--- a/CatCare产品介绍_用户视角.pptx
+++ b/CatCare产品介绍_用户视角.pptx
@@ -3143,9 +3143,33 @@
           </a:p>
         </p:txBody>
       </p:sp>
-      <p:sp>
-        <p:nvSpPr>
-          <p:cNvPr id="3" name="TextBox 2"/>
+      <p:pic>
+        <p:nvPicPr>
+          <p:cNvPr id="3" name="Picture 2" descr="shenicest.png"/>
+          <p:cNvPicPr>
+            <a:picLocks noChangeAspect="1"/>
+          </p:cNvPicPr>
+          <p:nvPr/>
+        </p:nvPicPr>
+        <p:blipFill>
+          <a:blip r:embed="rId2"/>
+          <a:stretch>
+            <a:fillRect/>
+          </a:stretch>
+        </p:blipFill>
+        <p:spPr>
+          <a:xfrm rot="21360000">
+            <a:off x="9464040" y="502920"/>
+            <a:ext cx="1920240" cy="632806"/>
+          </a:xfrm>
+          <a:prstGeom prst="rect">
+            <a:avLst/>
+          </a:prstGeom>
+        </p:spPr>
+      </p:pic>
+      <p:sp>
+        <p:nvSpPr>
+          <p:cNvPr id="4" name="TextBox 3"/>
           <p:cNvSpPr txBox="1"/>
           <p:nvPr/>
         </p:nvSpPr>
@@ -3185,7 +3209,7 @@
       </p:sp>
       <p:sp>
         <p:nvSpPr>
-          <p:cNvPr id="4" name="TextBox 3"/>
+          <p:cNvPr id="5" name="TextBox 4"/>
           <p:cNvSpPr txBox="1"/>
           <p:nvPr/>
         </p:nvSpPr>
@@ -3252,7 +3276,7 @@
       </p:sp>
       <p:sp>
         <p:nvSpPr>
-          <p:cNvPr id="5" name="TextBox 4"/>
+          <p:cNvPr id="6" name="TextBox 5"/>
           <p:cNvSpPr txBox="1"/>
           <p:nvPr/>
         </p:nvSpPr>
@@ -3309,7 +3333,7 @@
       </p:sp>
       <p:sp>
         <p:nvSpPr>
-          <p:cNvPr id="6" name="TextBox 5"/>
+          <p:cNvPr id="7" name="TextBox 6"/>
           <p:cNvSpPr txBox="1"/>
           <p:nvPr/>
         </p:nvSpPr>
@@ -3349,7 +3373,7 @@
       </p:sp>
       <p:sp>
         <p:nvSpPr>
-          <p:cNvPr id="7" name="TextBox 6"/>
+          <p:cNvPr id="8" name="TextBox 7"/>
           <p:cNvSpPr txBox="1"/>
           <p:nvPr/>
         </p:nvSpPr>
@@ -3389,7 +3413,7 @@
       </p:sp>
       <p:sp>
         <p:nvSpPr>
-          <p:cNvPr id="8" name="TextBox 7"/>
+          <p:cNvPr id="9" name="TextBox 8"/>
           <p:cNvSpPr txBox="1"/>
           <p:nvPr/>
         </p:nvSpPr>
@@ -5375,9 +5399,33 @@
           </a:p>
         </p:txBody>
       </p:sp>
-      <p:sp>
-        <p:nvSpPr>
-          <p:cNvPr id="7" name="TextBox 6"/>
+      <p:pic>
+        <p:nvPicPr>
+          <p:cNvPr id="7" name="Picture 6" descr="shenicest.png"/>
+          <p:cNvPicPr>
+            <a:picLocks noChangeAspect="1"/>
+          </p:cNvPicPr>
+          <p:nvPr/>
+        </p:nvPicPr>
+        <p:blipFill>
+          <a:blip r:embed="rId2"/>
+          <a:stretch>
+            <a:fillRect/>
+          </a:stretch>
+        </p:blipFill>
+        <p:spPr>
+          <a:xfrm rot="240000">
+            <a:off x="9464040" y="548640"/>
+            <a:ext cx="1920240" cy="632806"/>
+          </a:xfrm>
+          <a:prstGeom prst="rect">
+            <a:avLst/>
+          </a:prstGeom>
+        </p:spPr>
+      </p:pic>
+      <p:sp>
+        <p:nvSpPr>
+          <p:cNvPr id="8" name="TextBox 7"/>
           <p:cNvSpPr txBox="1"/>
           <p:nvPr/>
         </p:nvSpPr>
@@ -5410,14 +5458,14 @@
                 <a:latin typeface="PingFang SC"/>
                 <a:ea typeface="PingFang SC"/>
               </a:rPr>
-              <a:t>CatCare · 2026 西红门镇产业创新黑客松</a:t>
-            </a:r>
-          </a:p>
-        </p:txBody>
-      </p:sp>
-      <p:sp>
-        <p:nvSpPr>
-          <p:cNvPr id="8" name="TextBox 7"/>
+              <a:t>CatCare · 2026 西红门镇产业创新黑客松 · 团队 SHENiCEST</a:t>
+            </a:r>
+          </a:p>
+        </p:txBody>
+      </p:sp>
+      <p:sp>
+        <p:nvSpPr>
+          <p:cNvPr id="9" name="TextBox 8"/>
           <p:cNvSpPr txBox="1"/>
           <p:nvPr/>
         </p:nvSpPr>

--- a/CatCare产品介绍_用户视角.pptx
+++ b/CatCare产品介绍_用户视角.pptx
@@ -17,6 +17,7 @@
     <p:sldId id="265" r:id="rId16"/>
     <p:sldId id="266" r:id="rId17"/>
     <p:sldId id="267" r:id="rId18"/>
+    <p:sldId id="268" r:id="rId19"/>
   </p:sldIdLst>
   <p:sldSz cx="12191695" cy="6858000" type="screen4x3"/>
   <p:notesSz cx="6858000" cy="9144000"/>
@@ -5212,91 +5213,84 @@
         </p:nvSpPr>
         <p:spPr>
           <a:xfrm>
-            <a:off x="822960" y="2103120"/>
-            <a:ext cx="10515600" cy="2011680"/>
-          </a:xfrm>
-          <a:prstGeom prst="rect">
-            <a:avLst/>
-          </a:prstGeom>
-          <a:noFill/>
-        </p:spPr>
-        <p:txBody>
-          <a:bodyPr wrap="square" anchor="t">
-            <a:spAutoFit/>
-          </a:bodyPr>
-          <a:lstStyle/>
-          <a:p>
-            <a:pPr algn="l">
-              <a:lnSpc>
-                <a:spcPct val="135000"/>
-              </a:lnSpc>
-            </a:pPr>
-            <a:r>
-              <a:rPr sz="4000" b="1">
+            <a:off x="822960" y="502920"/>
+            <a:ext cx="10515600" cy="365760"/>
+          </a:xfrm>
+          <a:prstGeom prst="rect">
+            <a:avLst/>
+          </a:prstGeom>
+          <a:noFill/>
+        </p:spPr>
+        <p:txBody>
+          <a:bodyPr wrap="square" anchor="t">
+            <a:spAutoFit/>
+          </a:bodyPr>
+          <a:lstStyle/>
+          <a:p>
+            <a:pPr algn="l">
+              <a:lnSpc>
+                <a:spcPct val="125000"/>
+              </a:lnSpc>
+            </a:pPr>
+            <a:r>
+              <a:rPr sz="1300" b="1">
+                <a:solidFill>
+                  <a:srgbClr val="00C2CE"/>
+                </a:solidFill>
+                <a:latin typeface="PingFang SC"/>
+                <a:ea typeface="PingFang SC"/>
+              </a:rPr>
+              <a:t>定价结构 · 不做 Free/Pro/Max 三档表</a:t>
+            </a:r>
+          </a:p>
+        </p:txBody>
+      </p:sp>
+      <p:sp>
+        <p:nvSpPr>
+          <p:cNvPr id="4" name="TextBox 3"/>
+          <p:cNvSpPr txBox="1"/>
+          <p:nvPr/>
+        </p:nvSpPr>
+        <p:spPr>
+          <a:xfrm>
+            <a:off x="822960" y="868680"/>
+            <a:ext cx="10698480" cy="822960"/>
+          </a:xfrm>
+          <a:prstGeom prst="rect">
+            <a:avLst/>
+          </a:prstGeom>
+          <a:noFill/>
+        </p:spPr>
+        <p:txBody>
+          <a:bodyPr wrap="square" anchor="t">
+            <a:spAutoFit/>
+          </a:bodyPr>
+          <a:lstStyle/>
+          <a:p>
+            <a:pPr algn="l">
+              <a:lnSpc>
+                <a:spcPct val="125000"/>
+              </a:lnSpc>
+            </a:pPr>
+            <a:r>
+              <a:rPr sz="3200" b="1">
                 <a:solidFill>
                   <a:srgbClr val="175A5E"/>
                 </a:solidFill>
                 <a:latin typeface="PingFang SC"/>
                 <a:ea typeface="PingFang SC"/>
               </a:rPr>
-              <a:t>每一只被捡回家的猫，</a:t>
-            </a:r>
-          </a:p>
-          <a:p>
-            <a:pPr algn="l">
-              <a:lnSpc>
-                <a:spcPct val="135000"/>
-              </a:lnSpc>
-            </a:pPr>
-            <a:r>
-              <a:rPr sz="4000" b="1">
+              <a:t>三端买的东西不同，</a:t>
+            </a:r>
+            <a:r>
+              <a:rPr sz="3200" b="1">
                 <a:solidFill>
                   <a:srgbClr val="00C2CE"/>
                 </a:solidFill>
                 <a:latin typeface="PingFang SC"/>
                 <a:ea typeface="PingFang SC"/>
               </a:rPr>
-              <a:t>都值得一个不慌的主人。</a:t>
-            </a:r>
-          </a:p>
-        </p:txBody>
-      </p:sp>
-      <p:sp>
-        <p:nvSpPr>
-          <p:cNvPr id="4" name="TextBox 3"/>
-          <p:cNvSpPr txBox="1"/>
-          <p:nvPr/>
-        </p:nvSpPr>
-        <p:spPr>
-          <a:xfrm>
-            <a:off x="822960" y="4480560"/>
-            <a:ext cx="10515600" cy="548640"/>
-          </a:xfrm>
-          <a:prstGeom prst="rect">
-            <a:avLst/>
-          </a:prstGeom>
-          <a:noFill/>
-        </p:spPr>
-        <p:txBody>
-          <a:bodyPr wrap="square" anchor="t">
-            <a:spAutoFit/>
-          </a:bodyPr>
-          <a:lstStyle/>
-          <a:p>
-            <a:pPr algn="l">
-              <a:lnSpc>
-                <a:spcPct val="125000"/>
-              </a:lnSpc>
-            </a:pPr>
-            <a:r>
-              <a:rPr sz="1700" b="0">
-                <a:solidFill>
-                  <a:srgbClr val="5E9095"/>
-                </a:solidFill>
-                <a:latin typeface="PingFang SC"/>
-                <a:ea typeface="PingFang SC"/>
-              </a:rPr>
-              <a:t>现在就可以体验 · 手机打开即用，无需安装</a:t>
+              <a:t>就各收各的钱</a:t>
             </a:r>
           </a:p>
         </p:txBody>
@@ -5309,12 +5303,60 @@
         </p:nvSpPr>
         <p:spPr>
           <a:xfrm>
-            <a:off x="822960" y="5074920"/>
-            <a:ext cx="4754880" cy="566928"/>
+            <a:off x="822960" y="1874519"/>
+            <a:ext cx="3337560" cy="3977639"/>
           </a:xfrm>
           <a:prstGeom prst="roundRect">
             <a:avLst>
-              <a:gd name="adj" fmla="val 50000"/>
+              <a:gd name="adj" fmla="val 8000"/>
+            </a:avLst>
+          </a:prstGeom>
+          <a:solidFill>
+            <a:srgbClr val="FFFFFF"/>
+          </a:solidFill>
+          <a:ln w="12700">
+            <a:solidFill>
+              <a:srgbClr val="D5EEEC"/>
+            </a:solidFill>
+          </a:ln>
+          <a:effectLst/>
+        </p:spPr>
+        <p:style>
+          <a:lnRef idx="1">
+            <a:schemeClr val="accent1"/>
+          </a:lnRef>
+          <a:fillRef idx="3">
+            <a:schemeClr val="accent1"/>
+          </a:fillRef>
+          <a:effectRef idx="2">
+            <a:schemeClr val="accent1"/>
+          </a:effectRef>
+          <a:fontRef idx="minor">
+            <a:schemeClr val="lt1"/>
+          </a:fontRef>
+        </p:style>
+        <p:txBody>
+          <a:bodyPr rtlCol="0" anchor="ctr"/>
+          <a:lstStyle/>
+          <a:p>
+            <a:pPr algn="ctr"/>
+          </a:p>
+        </p:txBody>
+      </p:sp>
+      <p:sp>
+        <p:nvSpPr>
+          <p:cNvPr id="6" name="Rounded Rectangle 5"/>
+          <p:cNvSpPr/>
+          <p:nvPr/>
+        </p:nvSpPr>
+        <p:spPr>
+          <a:xfrm>
+            <a:off x="822960" y="1874519"/>
+            <a:ext cx="3337560" cy="914400"/>
+          </a:xfrm>
+          <a:prstGeom prst="roundRect">
+            <a:avLst>
+              <a:gd name="adj" fmla="val 8000"/>
             </a:avLst>
           </a:prstGeom>
           <a:solidFill>
@@ -5342,6 +5384,1285 @@
           </a:fontRef>
         </p:style>
         <p:txBody>
+          <a:bodyPr rtlCol="0" anchor="ctr"/>
+          <a:lstStyle/>
+          <a:p>
+            <a:pPr algn="ctr"/>
+          </a:p>
+        </p:txBody>
+      </p:sp>
+      <p:sp>
+        <p:nvSpPr>
+          <p:cNvPr id="7" name="TextBox 6"/>
+          <p:cNvSpPr txBox="1"/>
+          <p:nvPr/>
+        </p:nvSpPr>
+        <p:spPr>
+          <a:xfrm>
+            <a:off x="1097280" y="2029968"/>
+            <a:ext cx="2834640" cy="457200"/>
+          </a:xfrm>
+          <a:prstGeom prst="rect">
+            <a:avLst/>
+          </a:prstGeom>
+          <a:noFill/>
+        </p:spPr>
+        <p:txBody>
+          <a:bodyPr wrap="square" anchor="t">
+            <a:spAutoFit/>
+          </a:bodyPr>
+          <a:lstStyle/>
+          <a:p>
+            <a:pPr algn="l">
+              <a:lnSpc>
+                <a:spcPct val="125000"/>
+              </a:lnSpc>
+            </a:pPr>
+            <a:r>
+              <a:rPr sz="1700" b="0">
+                <a:solidFill>
+                  <a:srgbClr val="175A5E"/>
+                </a:solidFill>
+                <a:latin typeface="PingFang SC"/>
+                <a:ea typeface="PingFang SC"/>
+              </a:rPr>
+              <a:t>🐱  </a:t>
+            </a:r>
+            <a:r>
+              <a:rPr sz="1700" b="1">
+                <a:solidFill>
+                  <a:srgbClr val="175A5E"/>
+                </a:solidFill>
+                <a:latin typeface="PingFang SC"/>
+                <a:ea typeface="PingFang SC"/>
+              </a:rPr>
+              <a:t>toC 用户</a:t>
+            </a:r>
+          </a:p>
+        </p:txBody>
+      </p:sp>
+      <p:sp>
+        <p:nvSpPr>
+          <p:cNvPr id="8" name="TextBox 7"/>
+          <p:cNvSpPr txBox="1"/>
+          <p:nvPr/>
+        </p:nvSpPr>
+        <p:spPr>
+          <a:xfrm>
+            <a:off x="1097280" y="2395728"/>
+            <a:ext cx="2834640" cy="365760"/>
+          </a:xfrm>
+          <a:prstGeom prst="rect">
+            <a:avLst/>
+          </a:prstGeom>
+          <a:noFill/>
+        </p:spPr>
+        <p:txBody>
+          <a:bodyPr wrap="square" anchor="t">
+            <a:spAutoFit/>
+          </a:bodyPr>
+          <a:lstStyle/>
+          <a:p>
+            <a:pPr algn="l">
+              <a:lnSpc>
+                <a:spcPct val="125000"/>
+              </a:lnSpc>
+            </a:pPr>
+            <a:r>
+              <a:rPr sz="1300" b="1">
+                <a:solidFill>
+                  <a:srgbClr val="00C2CE"/>
+                </a:solidFill>
+                <a:latin typeface="PingFang SC"/>
+                <a:ea typeface="PingFang SC"/>
+              </a:rPr>
+              <a:t>免费 + 单点消费</a:t>
+            </a:r>
+          </a:p>
+        </p:txBody>
+      </p:sp>
+      <p:sp>
+        <p:nvSpPr>
+          <p:cNvPr id="9" name="TextBox 8"/>
+          <p:cNvSpPr txBox="1"/>
+          <p:nvPr/>
+        </p:nvSpPr>
+        <p:spPr>
+          <a:xfrm>
+            <a:off x="1097280" y="2999232"/>
+            <a:ext cx="2834640" cy="621792"/>
+          </a:xfrm>
+          <a:prstGeom prst="rect">
+            <a:avLst/>
+          </a:prstGeom>
+          <a:noFill/>
+        </p:spPr>
+        <p:txBody>
+          <a:bodyPr wrap="square" anchor="t">
+            <a:spAutoFit/>
+          </a:bodyPr>
+          <a:lstStyle/>
+          <a:p>
+            <a:pPr algn="l">
+              <a:lnSpc>
+                <a:spcPct val="125000"/>
+              </a:lnSpc>
+            </a:pPr>
+            <a:r>
+              <a:rPr sz="1250" b="0">
+                <a:solidFill>
+                  <a:srgbClr val="175A5E"/>
+                </a:solidFill>
+                <a:latin typeface="PingFang SC"/>
+                <a:ea typeface="PingFang SC"/>
+              </a:rPr>
+              <a:t>· 核心功能永远免费（分诊/时间线/知识库）</a:t>
+            </a:r>
+          </a:p>
+        </p:txBody>
+      </p:sp>
+      <p:sp>
+        <p:nvSpPr>
+          <p:cNvPr id="10" name="TextBox 9"/>
+          <p:cNvSpPr txBox="1"/>
+          <p:nvPr/>
+        </p:nvSpPr>
+        <p:spPr>
+          <a:xfrm>
+            <a:off x="1097280" y="3657600"/>
+            <a:ext cx="2834640" cy="621792"/>
+          </a:xfrm>
+          <a:prstGeom prst="rect">
+            <a:avLst/>
+          </a:prstGeom>
+          <a:noFill/>
+        </p:spPr>
+        <p:txBody>
+          <a:bodyPr wrap="square" anchor="t">
+            <a:spAutoFit/>
+          </a:bodyPr>
+          <a:lstStyle/>
+          <a:p>
+            <a:pPr algn="l">
+              <a:lnSpc>
+                <a:spcPct val="125000"/>
+              </a:lnSpc>
+            </a:pPr>
+            <a:r>
+              <a:rPr sz="1250" b="0">
+                <a:solidFill>
+                  <a:srgbClr val="175A5E"/>
+                </a:solidFill>
+                <a:latin typeface="PingFang SC"/>
+                <a:ea typeface="PingFang SC"/>
+              </a:rPr>
+              <a:t>· 文创周边 9.9 元起，按件付</a:t>
+            </a:r>
+          </a:p>
+        </p:txBody>
+      </p:sp>
+      <p:sp>
+        <p:nvSpPr>
+          <p:cNvPr id="11" name="TextBox 10"/>
+          <p:cNvSpPr txBox="1"/>
+          <p:nvPr/>
+        </p:nvSpPr>
+        <p:spPr>
+          <a:xfrm>
+            <a:off x="1097280" y="4315968"/>
+            <a:ext cx="2834640" cy="621792"/>
+          </a:xfrm>
+          <a:prstGeom prst="rect">
+            <a:avLst/>
+          </a:prstGeom>
+          <a:noFill/>
+        </p:spPr>
+        <p:txBody>
+          <a:bodyPr wrap="square" anchor="t">
+            <a:spAutoFit/>
+          </a:bodyPr>
+          <a:lstStyle/>
+          <a:p>
+            <a:pPr algn="l">
+              <a:lnSpc>
+                <a:spcPct val="125000"/>
+              </a:lnSpc>
+            </a:pPr>
+            <a:r>
+              <a:rPr sz="1250" b="0">
+                <a:solidFill>
+                  <a:srgbClr val="175A5E"/>
+                </a:solidFill>
+                <a:latin typeface="PingFang SC"/>
+                <a:ea typeface="PingFang SC"/>
+              </a:rPr>
+              <a:t>· 商品推荐佣金，只推档案相关的</a:t>
+            </a:r>
+          </a:p>
+        </p:txBody>
+      </p:sp>
+      <p:sp>
+        <p:nvSpPr>
+          <p:cNvPr id="12" name="TextBox 11"/>
+          <p:cNvSpPr txBox="1"/>
+          <p:nvPr/>
+        </p:nvSpPr>
+        <p:spPr>
+          <a:xfrm>
+            <a:off x="1097280" y="5138928"/>
+            <a:ext cx="2834640" cy="548640"/>
+          </a:xfrm>
+          <a:prstGeom prst="rect">
+            <a:avLst/>
+          </a:prstGeom>
+          <a:noFill/>
+        </p:spPr>
+        <p:txBody>
+          <a:bodyPr wrap="square" anchor="t">
+            <a:spAutoFit/>
+          </a:bodyPr>
+          <a:lstStyle/>
+          <a:p>
+            <a:pPr algn="l">
+              <a:lnSpc>
+                <a:spcPct val="125000"/>
+              </a:lnSpc>
+            </a:pPr>
+            <a:r>
+              <a:rPr sz="1150" b="1">
+                <a:solidFill>
+                  <a:srgbClr val="5E9095"/>
+                </a:solidFill>
+                <a:latin typeface="PingFang SC"/>
+                <a:ea typeface="PingFang SC"/>
+              </a:rPr>
+              <a:t>买的是安心 · 不设会员墙</a:t>
+            </a:r>
+          </a:p>
+        </p:txBody>
+      </p:sp>
+      <p:sp>
+        <p:nvSpPr>
+          <p:cNvPr id="13" name="Rounded Rectangle 12"/>
+          <p:cNvSpPr/>
+          <p:nvPr/>
+        </p:nvSpPr>
+        <p:spPr>
+          <a:xfrm>
+            <a:off x="4434840" y="1874519"/>
+            <a:ext cx="3337560" cy="3977639"/>
+          </a:xfrm>
+          <a:prstGeom prst="roundRect">
+            <a:avLst>
+              <a:gd name="adj" fmla="val 8000"/>
+            </a:avLst>
+          </a:prstGeom>
+          <a:solidFill>
+            <a:srgbClr val="FFFFFF"/>
+          </a:solidFill>
+          <a:ln w="12700">
+            <a:solidFill>
+              <a:srgbClr val="D5EEEC"/>
+            </a:solidFill>
+          </a:ln>
+          <a:effectLst/>
+        </p:spPr>
+        <p:style>
+          <a:lnRef idx="1">
+            <a:schemeClr val="accent1"/>
+          </a:lnRef>
+          <a:fillRef idx="3">
+            <a:schemeClr val="accent1"/>
+          </a:fillRef>
+          <a:effectRef idx="2">
+            <a:schemeClr val="accent1"/>
+          </a:effectRef>
+          <a:fontRef idx="minor">
+            <a:schemeClr val="lt1"/>
+          </a:fontRef>
+        </p:style>
+        <p:txBody>
+          <a:bodyPr rtlCol="0" anchor="ctr"/>
+          <a:lstStyle/>
+          <a:p>
+            <a:pPr algn="ctr"/>
+          </a:p>
+        </p:txBody>
+      </p:sp>
+      <p:sp>
+        <p:nvSpPr>
+          <p:cNvPr id="14" name="Rounded Rectangle 13"/>
+          <p:cNvSpPr/>
+          <p:nvPr/>
+        </p:nvSpPr>
+        <p:spPr>
+          <a:xfrm>
+            <a:off x="4434840" y="1874519"/>
+            <a:ext cx="3337560" cy="914400"/>
+          </a:xfrm>
+          <a:prstGeom prst="roundRect">
+            <a:avLst>
+              <a:gd name="adj" fmla="val 8000"/>
+            </a:avLst>
+          </a:prstGeom>
+          <a:solidFill>
+            <a:srgbClr val="FFF4DB"/>
+          </a:solidFill>
+          <a:ln w="12700">
+            <a:solidFill>
+              <a:srgbClr val="FFF4DB"/>
+            </a:solidFill>
+          </a:ln>
+          <a:effectLst/>
+        </p:spPr>
+        <p:style>
+          <a:lnRef idx="1">
+            <a:schemeClr val="accent1"/>
+          </a:lnRef>
+          <a:fillRef idx="3">
+            <a:schemeClr val="accent1"/>
+          </a:fillRef>
+          <a:effectRef idx="2">
+            <a:schemeClr val="accent1"/>
+          </a:effectRef>
+          <a:fontRef idx="minor">
+            <a:schemeClr val="lt1"/>
+          </a:fontRef>
+        </p:style>
+        <p:txBody>
+          <a:bodyPr rtlCol="0" anchor="ctr"/>
+          <a:lstStyle/>
+          <a:p>
+            <a:pPr algn="ctr"/>
+          </a:p>
+        </p:txBody>
+      </p:sp>
+      <p:sp>
+        <p:nvSpPr>
+          <p:cNvPr id="15" name="TextBox 14"/>
+          <p:cNvSpPr txBox="1"/>
+          <p:nvPr/>
+        </p:nvSpPr>
+        <p:spPr>
+          <a:xfrm>
+            <a:off x="4709160" y="2029968"/>
+            <a:ext cx="2834640" cy="457200"/>
+          </a:xfrm>
+          <a:prstGeom prst="rect">
+            <a:avLst/>
+          </a:prstGeom>
+          <a:noFill/>
+        </p:spPr>
+        <p:txBody>
+          <a:bodyPr wrap="square" anchor="t">
+            <a:spAutoFit/>
+          </a:bodyPr>
+          <a:lstStyle/>
+          <a:p>
+            <a:pPr algn="l">
+              <a:lnSpc>
+                <a:spcPct val="125000"/>
+              </a:lnSpc>
+            </a:pPr>
+            <a:r>
+              <a:rPr sz="1700" b="0">
+                <a:solidFill>
+                  <a:srgbClr val="175A5E"/>
+                </a:solidFill>
+                <a:latin typeface="PingFang SC"/>
+                <a:ea typeface="PingFang SC"/>
+              </a:rPr>
+              <a:t>🏥  </a:t>
+            </a:r>
+            <a:r>
+              <a:rPr sz="1700" b="1">
+                <a:solidFill>
+                  <a:srgbClr val="175A5E"/>
+                </a:solidFill>
+                <a:latin typeface="PingFang SC"/>
+                <a:ea typeface="PingFang SC"/>
+              </a:rPr>
+              <a:t>toB 医院/商家</a:t>
+            </a:r>
+          </a:p>
+        </p:txBody>
+      </p:sp>
+      <p:sp>
+        <p:nvSpPr>
+          <p:cNvPr id="16" name="TextBox 15"/>
+          <p:cNvSpPr txBox="1"/>
+          <p:nvPr/>
+        </p:nvSpPr>
+        <p:spPr>
+          <a:xfrm>
+            <a:off x="4709160" y="2395728"/>
+            <a:ext cx="2834640" cy="365760"/>
+          </a:xfrm>
+          <a:prstGeom prst="rect">
+            <a:avLst/>
+          </a:prstGeom>
+          <a:noFill/>
+        </p:spPr>
+        <p:txBody>
+          <a:bodyPr wrap="square" anchor="t">
+            <a:spAutoFit/>
+          </a:bodyPr>
+          <a:lstStyle/>
+          <a:p>
+            <a:pPr algn="l">
+              <a:lnSpc>
+                <a:spcPct val="125000"/>
+              </a:lnSpc>
+            </a:pPr>
+            <a:r>
+              <a:rPr sz="1300" b="1">
+                <a:solidFill>
+                  <a:srgbClr val="C77700"/>
+                </a:solidFill>
+                <a:latin typeface="PingFang SC"/>
+                <a:ea typeface="PingFang SC"/>
+              </a:rPr>
+              <a:t>效果与位置付费</a:t>
+            </a:r>
+          </a:p>
+        </p:txBody>
+      </p:sp>
+      <p:sp>
+        <p:nvSpPr>
+          <p:cNvPr id="17" name="TextBox 16"/>
+          <p:cNvSpPr txBox="1"/>
+          <p:nvPr/>
+        </p:nvSpPr>
+        <p:spPr>
+          <a:xfrm>
+            <a:off x="4709160" y="2999232"/>
+            <a:ext cx="2834640" cy="621792"/>
+          </a:xfrm>
+          <a:prstGeom prst="rect">
+            <a:avLst/>
+          </a:prstGeom>
+          <a:noFill/>
+        </p:spPr>
+        <p:txBody>
+          <a:bodyPr wrap="square" anchor="t">
+            <a:spAutoFit/>
+          </a:bodyPr>
+          <a:lstStyle/>
+          <a:p>
+            <a:pPr algn="l">
+              <a:lnSpc>
+                <a:spcPct val="125000"/>
+              </a:lnSpc>
+            </a:pPr>
+            <a:r>
+              <a:rPr sz="1250" b="0">
+                <a:solidFill>
+                  <a:srgbClr val="175A5E"/>
+                </a:solidFill>
+                <a:latin typeface="PingFang SC"/>
+                <a:ea typeface="PingFang SC"/>
+              </a:rPr>
+              <a:t>· 免费接入，先攒到店转介绍数据</a:t>
+            </a:r>
+          </a:p>
+        </p:txBody>
+      </p:sp>
+      <p:sp>
+        <p:nvSpPr>
+          <p:cNvPr id="18" name="TextBox 17"/>
+          <p:cNvSpPr txBox="1"/>
+          <p:nvPr/>
+        </p:nvSpPr>
+        <p:spPr>
+          <a:xfrm>
+            <a:off x="4709160" y="3657600"/>
+            <a:ext cx="2834640" cy="621792"/>
+          </a:xfrm>
+          <a:prstGeom prst="rect">
+            <a:avLst/>
+          </a:prstGeom>
+          <a:noFill/>
+        </p:spPr>
+        <p:txBody>
+          <a:bodyPr wrap="square" anchor="t">
+            <a:spAutoFit/>
+          </a:bodyPr>
+          <a:lstStyle/>
+          <a:p>
+            <a:pPr algn="l">
+              <a:lnSpc>
+                <a:spcPct val="125000"/>
+              </a:lnSpc>
+            </a:pPr>
+            <a:r>
+              <a:rPr sz="1250" b="0">
+                <a:solidFill>
+                  <a:srgbClr val="175A5E"/>
+                </a:solidFill>
+                <a:latin typeface="PingFang SC"/>
+                <a:ea typeface="PingFang SC"/>
+              </a:rPr>
+              <a:t>· 推荐位月费（数百元级）</a:t>
+            </a:r>
+          </a:p>
+        </p:txBody>
+      </p:sp>
+      <p:sp>
+        <p:nvSpPr>
+          <p:cNvPr id="19" name="TextBox 18"/>
+          <p:cNvSpPr txBox="1"/>
+          <p:nvPr/>
+        </p:nvSpPr>
+        <p:spPr>
+          <a:xfrm>
+            <a:off x="4709160" y="4315968"/>
+            <a:ext cx="2834640" cy="621792"/>
+          </a:xfrm>
+          <a:prstGeom prst="rect">
+            <a:avLst/>
+          </a:prstGeom>
+          <a:noFill/>
+        </p:spPr>
+        <p:txBody>
+          <a:bodyPr wrap="square" anchor="t">
+            <a:spAutoFit/>
+          </a:bodyPr>
+          <a:lstStyle/>
+          <a:p>
+            <a:pPr algn="l">
+              <a:lnSpc>
+                <a:spcPct val="125000"/>
+              </a:lnSpc>
+            </a:pPr>
+            <a:r>
+              <a:rPr sz="1250" b="0">
+                <a:solidFill>
+                  <a:srgbClr val="175A5E"/>
+                </a:solidFill>
+                <a:latin typeface="PingFang SC"/>
+                <a:ea typeface="PingFang SC"/>
+              </a:rPr>
+              <a:t>· 转介绍分成 / 联名活动分成</a:t>
+            </a:r>
+          </a:p>
+        </p:txBody>
+      </p:sp>
+      <p:sp>
+        <p:nvSpPr>
+          <p:cNvPr id="20" name="TextBox 19"/>
+          <p:cNvSpPr txBox="1"/>
+          <p:nvPr/>
+        </p:nvSpPr>
+        <p:spPr>
+          <a:xfrm>
+            <a:off x="4709160" y="5138928"/>
+            <a:ext cx="2834640" cy="548640"/>
+          </a:xfrm>
+          <a:prstGeom prst="rect">
+            <a:avLst/>
+          </a:prstGeom>
+          <a:noFill/>
+        </p:spPr>
+        <p:txBody>
+          <a:bodyPr wrap="square" anchor="t">
+            <a:spAutoFit/>
+          </a:bodyPr>
+          <a:lstStyle/>
+          <a:p>
+            <a:pPr algn="l">
+              <a:lnSpc>
+                <a:spcPct val="125000"/>
+              </a:lnSpc>
+            </a:pPr>
+            <a:r>
+              <a:rPr sz="1150" b="1">
+                <a:solidFill>
+                  <a:srgbClr val="5E9095"/>
+                </a:solidFill>
+                <a:latin typeface="PingFang SC"/>
+                <a:ea typeface="PingFang SC"/>
+              </a:rPr>
+              <a:t>买的是精准客源 · 不卖软件</a:t>
+            </a:r>
+          </a:p>
+        </p:txBody>
+      </p:sp>
+      <p:sp>
+        <p:nvSpPr>
+          <p:cNvPr id="21" name="Rounded Rectangle 20"/>
+          <p:cNvSpPr/>
+          <p:nvPr/>
+        </p:nvSpPr>
+        <p:spPr>
+          <a:xfrm>
+            <a:off x="8046720" y="1874519"/>
+            <a:ext cx="3337560" cy="3977639"/>
+          </a:xfrm>
+          <a:prstGeom prst="roundRect">
+            <a:avLst>
+              <a:gd name="adj" fmla="val 8000"/>
+            </a:avLst>
+          </a:prstGeom>
+          <a:solidFill>
+            <a:srgbClr val="FFFFFF"/>
+          </a:solidFill>
+          <a:ln w="12700">
+            <a:solidFill>
+              <a:srgbClr val="D5EEEC"/>
+            </a:solidFill>
+          </a:ln>
+          <a:effectLst/>
+        </p:spPr>
+        <p:style>
+          <a:lnRef idx="1">
+            <a:schemeClr val="accent1"/>
+          </a:lnRef>
+          <a:fillRef idx="3">
+            <a:schemeClr val="accent1"/>
+          </a:fillRef>
+          <a:effectRef idx="2">
+            <a:schemeClr val="accent1"/>
+          </a:effectRef>
+          <a:fontRef idx="minor">
+            <a:schemeClr val="lt1"/>
+          </a:fontRef>
+        </p:style>
+        <p:txBody>
+          <a:bodyPr rtlCol="0" anchor="ctr"/>
+          <a:lstStyle/>
+          <a:p>
+            <a:pPr algn="ctr"/>
+          </a:p>
+        </p:txBody>
+      </p:sp>
+      <p:sp>
+        <p:nvSpPr>
+          <p:cNvPr id="22" name="Rounded Rectangle 21"/>
+          <p:cNvSpPr/>
+          <p:nvPr/>
+        </p:nvSpPr>
+        <p:spPr>
+          <a:xfrm>
+            <a:off x="8046720" y="1874519"/>
+            <a:ext cx="3337560" cy="914400"/>
+          </a:xfrm>
+          <a:prstGeom prst="roundRect">
+            <a:avLst>
+              <a:gd name="adj" fmla="val 8000"/>
+            </a:avLst>
+          </a:prstGeom>
+          <a:solidFill>
+            <a:srgbClr val="FFE9E9"/>
+          </a:solidFill>
+          <a:ln w="12700">
+            <a:solidFill>
+              <a:srgbClr val="FFE9E9"/>
+            </a:solidFill>
+          </a:ln>
+          <a:effectLst/>
+        </p:spPr>
+        <p:style>
+          <a:lnRef idx="1">
+            <a:schemeClr val="accent1"/>
+          </a:lnRef>
+          <a:fillRef idx="3">
+            <a:schemeClr val="accent1"/>
+          </a:fillRef>
+          <a:effectRef idx="2">
+            <a:schemeClr val="accent1"/>
+          </a:effectRef>
+          <a:fontRef idx="minor">
+            <a:schemeClr val="lt1"/>
+          </a:fontRef>
+        </p:style>
+        <p:txBody>
+          <a:bodyPr rtlCol="0" anchor="ctr"/>
+          <a:lstStyle/>
+          <a:p>
+            <a:pPr algn="ctr"/>
+          </a:p>
+        </p:txBody>
+      </p:sp>
+      <p:sp>
+        <p:nvSpPr>
+          <p:cNvPr id="23" name="TextBox 22"/>
+          <p:cNvSpPr txBox="1"/>
+          <p:nvPr/>
+        </p:nvSpPr>
+        <p:spPr>
+          <a:xfrm>
+            <a:off x="8321040" y="2029968"/>
+            <a:ext cx="2834640" cy="457200"/>
+          </a:xfrm>
+          <a:prstGeom prst="rect">
+            <a:avLst/>
+          </a:prstGeom>
+          <a:noFill/>
+        </p:spPr>
+        <p:txBody>
+          <a:bodyPr wrap="square" anchor="t">
+            <a:spAutoFit/>
+          </a:bodyPr>
+          <a:lstStyle/>
+          <a:p>
+            <a:pPr algn="l">
+              <a:lnSpc>
+                <a:spcPct val="125000"/>
+              </a:lnSpc>
+            </a:pPr>
+            <a:r>
+              <a:rPr sz="1700" b="0">
+                <a:solidFill>
+                  <a:srgbClr val="175A5E"/>
+                </a:solidFill>
+                <a:latin typeface="PingFang SC"/>
+                <a:ea typeface="PingFang SC"/>
+              </a:rPr>
+              <a:t>🏛️  </a:t>
+            </a:r>
+            <a:r>
+              <a:rPr sz="1700" b="1">
+                <a:solidFill>
+                  <a:srgbClr val="175A5E"/>
+                </a:solidFill>
+                <a:latin typeface="PingFang SC"/>
+                <a:ea typeface="PingFang SC"/>
+              </a:rPr>
+              <a:t>toG 政府</a:t>
+            </a:r>
+          </a:p>
+        </p:txBody>
+      </p:sp>
+      <p:sp>
+        <p:nvSpPr>
+          <p:cNvPr id="24" name="TextBox 23"/>
+          <p:cNvSpPr txBox="1"/>
+          <p:nvPr/>
+        </p:nvSpPr>
+        <p:spPr>
+          <a:xfrm>
+            <a:off x="8321040" y="2395728"/>
+            <a:ext cx="2834640" cy="365760"/>
+          </a:xfrm>
+          <a:prstGeom prst="rect">
+            <a:avLst/>
+          </a:prstGeom>
+          <a:noFill/>
+        </p:spPr>
+        <p:txBody>
+          <a:bodyPr wrap="square" anchor="t">
+            <a:spAutoFit/>
+          </a:bodyPr>
+          <a:lstStyle/>
+          <a:p>
+            <a:pPr algn="l">
+              <a:lnSpc>
+                <a:spcPct val="125000"/>
+              </a:lnSpc>
+            </a:pPr>
+            <a:r>
+              <a:rPr sz="1300" b="1">
+                <a:solidFill>
+                  <a:srgbClr val="FF5D5D"/>
+                </a:solidFill>
+                <a:latin typeface="PingFang SC"/>
+                <a:ea typeface="PingFang SC"/>
+              </a:rPr>
+              <a:t>项目制合作</a:t>
+            </a:r>
+          </a:p>
+        </p:txBody>
+      </p:sp>
+      <p:sp>
+        <p:nvSpPr>
+          <p:cNvPr id="25" name="TextBox 24"/>
+          <p:cNvSpPr txBox="1"/>
+          <p:nvPr/>
+        </p:nvSpPr>
+        <p:spPr>
+          <a:xfrm>
+            <a:off x="8321040" y="2999232"/>
+            <a:ext cx="2834640" cy="621792"/>
+          </a:xfrm>
+          <a:prstGeom prst="rect">
+            <a:avLst/>
+          </a:prstGeom>
+          <a:noFill/>
+        </p:spPr>
+        <p:txBody>
+          <a:bodyPr wrap="square" anchor="t">
+            <a:spAutoFit/>
+          </a:bodyPr>
+          <a:lstStyle/>
+          <a:p>
+            <a:pPr algn="l">
+              <a:lnSpc>
+                <a:spcPct val="125000"/>
+              </a:lnSpc>
+            </a:pPr>
+            <a:r>
+              <a:rPr sz="1250" b="0">
+                <a:solidFill>
+                  <a:srgbClr val="175A5E"/>
+                </a:solidFill>
+                <a:latin typeface="PingFang SC"/>
+                <a:ea typeface="PingFang SC"/>
+              </a:rPr>
+              <a:t>· 免费试点换官方背书与数据接入</a:t>
+            </a:r>
+          </a:p>
+        </p:txBody>
+      </p:sp>
+      <p:sp>
+        <p:nvSpPr>
+          <p:cNvPr id="26" name="TextBox 25"/>
+          <p:cNvSpPr txBox="1"/>
+          <p:nvPr/>
+        </p:nvSpPr>
+        <p:spPr>
+          <a:xfrm>
+            <a:off x="8321040" y="3657600"/>
+            <a:ext cx="2834640" cy="621792"/>
+          </a:xfrm>
+          <a:prstGeom prst="rect">
+            <a:avLst/>
+          </a:prstGeom>
+          <a:noFill/>
+        </p:spPr>
+        <p:txBody>
+          <a:bodyPr wrap="square" anchor="t">
+            <a:spAutoFit/>
+          </a:bodyPr>
+          <a:lstStyle/>
+          <a:p>
+            <a:pPr algn="l">
+              <a:lnSpc>
+                <a:spcPct val="125000"/>
+              </a:lnSpc>
+            </a:pPr>
+            <a:r>
+              <a:rPr sz="1250" b="0">
+                <a:solidFill>
+                  <a:srgbClr val="175A5E"/>
+                </a:solidFill>
+                <a:latin typeface="PingFang SC"/>
+                <a:ea typeface="PingFang SC"/>
+              </a:rPr>
+              <a:t>· 数字化项目采购 / 购买服务</a:t>
+            </a:r>
+          </a:p>
+        </p:txBody>
+      </p:sp>
+      <p:sp>
+        <p:nvSpPr>
+          <p:cNvPr id="27" name="TextBox 26"/>
+          <p:cNvSpPr txBox="1"/>
+          <p:nvPr/>
+        </p:nvSpPr>
+        <p:spPr>
+          <a:xfrm>
+            <a:off x="8321040" y="4315968"/>
+            <a:ext cx="2834640" cy="621792"/>
+          </a:xfrm>
+          <a:prstGeom prst="rect">
+            <a:avLst/>
+          </a:prstGeom>
+          <a:noFill/>
+        </p:spPr>
+        <p:txBody>
+          <a:bodyPr wrap="square" anchor="t">
+            <a:spAutoFit/>
+          </a:bodyPr>
+          <a:lstStyle/>
+          <a:p>
+            <a:pPr algn="l">
+              <a:lnSpc>
+                <a:spcPct val="125000"/>
+              </a:lnSpc>
+            </a:pPr>
+            <a:r>
+              <a:rPr sz="1250" b="0">
+                <a:solidFill>
+                  <a:srgbClr val="175A5E"/>
+                </a:solidFill>
+                <a:latin typeface="PingFang SC"/>
+                <a:ea typeface="PingFang SC"/>
+              </a:rPr>
+              <a:t>· 一镇跑通，样板复制到下一个镇</a:t>
+            </a:r>
+          </a:p>
+        </p:txBody>
+      </p:sp>
+      <p:sp>
+        <p:nvSpPr>
+          <p:cNvPr id="28" name="TextBox 27"/>
+          <p:cNvSpPr txBox="1"/>
+          <p:nvPr/>
+        </p:nvSpPr>
+        <p:spPr>
+          <a:xfrm>
+            <a:off x="8321040" y="5138928"/>
+            <a:ext cx="2834640" cy="548640"/>
+          </a:xfrm>
+          <a:prstGeom prst="rect">
+            <a:avLst/>
+          </a:prstGeom>
+          <a:noFill/>
+        </p:spPr>
+        <p:txBody>
+          <a:bodyPr wrap="square" anchor="t">
+            <a:spAutoFit/>
+          </a:bodyPr>
+          <a:lstStyle/>
+          <a:p>
+            <a:pPr algn="l">
+              <a:lnSpc>
+                <a:spcPct val="125000"/>
+              </a:lnSpc>
+            </a:pPr>
+            <a:r>
+              <a:rPr sz="1150" b="1">
+                <a:solidFill>
+                  <a:srgbClr val="5E9095"/>
+                </a:solidFill>
+                <a:latin typeface="PingFang SC"/>
+                <a:ea typeface="PingFang SC"/>
+              </a:rPr>
+              <a:t>买的是治理样板 · 不按版本</a:t>
+            </a:r>
+          </a:p>
+        </p:txBody>
+      </p:sp>
+      <p:sp>
+        <p:nvSpPr>
+          <p:cNvPr id="29" name="TextBox 28"/>
+          <p:cNvSpPr txBox="1"/>
+          <p:nvPr/>
+        </p:nvSpPr>
+        <p:spPr>
+          <a:xfrm>
+            <a:off x="822960" y="5989320"/>
+            <a:ext cx="10515600" cy="502920"/>
+          </a:xfrm>
+          <a:prstGeom prst="rect">
+            <a:avLst/>
+          </a:prstGeom>
+          <a:noFill/>
+        </p:spPr>
+        <p:txBody>
+          <a:bodyPr wrap="square" anchor="t">
+            <a:spAutoFit/>
+          </a:bodyPr>
+          <a:lstStyle/>
+          <a:p>
+            <a:pPr algn="l">
+              <a:lnSpc>
+                <a:spcPct val="125000"/>
+              </a:lnSpc>
+            </a:pPr>
+            <a:r>
+              <a:rPr sz="1350" b="0">
+                <a:solidFill>
+                  <a:srgbClr val="5E9095"/>
+                </a:solidFill>
+                <a:latin typeface="PingFang SC"/>
+                <a:ea typeface="PingFang SC"/>
+              </a:rPr>
+              <a:t>为什么不做付费分层：分诊关乎猫命，任何「Pro 才更准」的暗示都会毒化信任——</a:t>
+            </a:r>
+            <a:r>
+              <a:rPr sz="1350" b="1">
+                <a:solidFill>
+                  <a:srgbClr val="175A5E"/>
+                </a:solidFill>
+                <a:latin typeface="PingFang SC"/>
+                <a:ea typeface="PingFang SC"/>
+              </a:rPr>
+              <a:t>信任是这个产品最大的资产。</a:t>
+            </a:r>
+          </a:p>
+        </p:txBody>
+      </p:sp>
+      <p:sp>
+        <p:nvSpPr>
+          <p:cNvPr id="30" name="TextBox 29"/>
+          <p:cNvSpPr txBox="1"/>
+          <p:nvPr/>
+        </p:nvSpPr>
+        <p:spPr>
+          <a:xfrm>
+            <a:off x="822960" y="6419088"/>
+            <a:ext cx="8229600" cy="320040"/>
+          </a:xfrm>
+          <a:prstGeom prst="rect">
+            <a:avLst/>
+          </a:prstGeom>
+          <a:noFill/>
+        </p:spPr>
+        <p:txBody>
+          <a:bodyPr wrap="square" anchor="t">
+            <a:spAutoFit/>
+          </a:bodyPr>
+          <a:lstStyle/>
+          <a:p>
+            <a:pPr algn="l">
+              <a:lnSpc>
+                <a:spcPct val="125000"/>
+              </a:lnSpc>
+            </a:pPr>
+            <a:r>
+              <a:rPr sz="1000" b="0">
+                <a:solidFill>
+                  <a:srgbClr val="5E9095"/>
+                </a:solidFill>
+                <a:latin typeface="PingFang SC"/>
+                <a:ea typeface="PingFang SC"/>
+              </a:rPr>
+              <a:t>CatCare · 定价结构</a:t>
+            </a:r>
+          </a:p>
+        </p:txBody>
+      </p:sp>
+      <p:sp>
+        <p:nvSpPr>
+          <p:cNvPr id="31" name="TextBox 30"/>
+          <p:cNvSpPr txBox="1"/>
+          <p:nvPr/>
+        </p:nvSpPr>
+        <p:spPr>
+          <a:xfrm>
+            <a:off x="10881360" y="6419088"/>
+            <a:ext cx="548640" cy="320040"/>
+          </a:xfrm>
+          <a:prstGeom prst="rect">
+            <a:avLst/>
+          </a:prstGeom>
+          <a:noFill/>
+        </p:spPr>
+        <p:txBody>
+          <a:bodyPr wrap="square" anchor="t">
+            <a:spAutoFit/>
+          </a:bodyPr>
+          <a:lstStyle/>
+          <a:p>
+            <a:pPr algn="r">
+              <a:lnSpc>
+                <a:spcPct val="125000"/>
+              </a:lnSpc>
+            </a:pPr>
+            <a:r>
+              <a:rPr sz="1000" b="0">
+                <a:solidFill>
+                  <a:srgbClr val="5E9095"/>
+                </a:solidFill>
+                <a:latin typeface="PingFang SC"/>
+                <a:ea typeface="PingFang SC"/>
+              </a:rPr>
+              <a:t>12</a:t>
+            </a:r>
+          </a:p>
+        </p:txBody>
+      </p:sp>
+    </p:spTree>
+  </p:cSld>
+  <p:clrMapOvr>
+    <a:masterClrMapping/>
+  </p:clrMapOvr>
+</p:sld>
+</file>
+
+<file path=ppt/slides/slide13.xml><?xml version="1.0" encoding="utf-8"?>
+<p:sld xmlns:a="http://schemas.openxmlformats.org/drawingml/2006/main" xmlns:p="http://schemas.openxmlformats.org/presentationml/2006/main" xmlns:r="http://schemas.openxmlformats.org/officeDocument/2006/relationships">
+  <p:cSld>
+    <p:spTree>
+      <p:nvGrpSpPr>
+        <p:cNvPr id="1" name=""/>
+        <p:cNvGrpSpPr/>
+        <p:nvPr/>
+      </p:nvGrpSpPr>
+      <p:grpSpPr/>
+      <p:sp>
+        <p:nvSpPr>
+          <p:cNvPr id="2" name="Rectangle 1"/>
+          <p:cNvSpPr/>
+          <p:nvPr/>
+        </p:nvSpPr>
+        <p:spPr>
+          <a:xfrm>
+            <a:off x="0" y="0"/>
+            <a:ext cx="12191695" cy="6858000"/>
+          </a:xfrm>
+          <a:prstGeom prst="rect">
+            <a:avLst/>
+          </a:prstGeom>
+          <a:solidFill>
+            <a:srgbClr val="EBF8F7"/>
+          </a:solidFill>
+          <a:ln>
+            <a:noFill/>
+          </a:ln>
+          <a:effectLst/>
+        </p:spPr>
+        <p:style>
+          <a:lnRef idx="1">
+            <a:schemeClr val="accent1"/>
+          </a:lnRef>
+          <a:fillRef idx="3">
+            <a:schemeClr val="accent1"/>
+          </a:fillRef>
+          <a:effectRef idx="2">
+            <a:schemeClr val="accent1"/>
+          </a:effectRef>
+          <a:fontRef idx="minor">
+            <a:schemeClr val="lt1"/>
+          </a:fontRef>
+        </p:style>
+        <p:txBody>
+          <a:bodyPr rtlCol="0" anchor="ctr"/>
+          <a:lstStyle/>
+          <a:p>
+            <a:pPr algn="ctr"/>
+          </a:p>
+        </p:txBody>
+      </p:sp>
+      <p:sp>
+        <p:nvSpPr>
+          <p:cNvPr id="3" name="TextBox 2"/>
+          <p:cNvSpPr txBox="1"/>
+          <p:nvPr/>
+        </p:nvSpPr>
+        <p:spPr>
+          <a:xfrm>
+            <a:off x="822960" y="2103120"/>
+            <a:ext cx="10515600" cy="2011680"/>
+          </a:xfrm>
+          <a:prstGeom prst="rect">
+            <a:avLst/>
+          </a:prstGeom>
+          <a:noFill/>
+        </p:spPr>
+        <p:txBody>
+          <a:bodyPr wrap="square" anchor="t">
+            <a:spAutoFit/>
+          </a:bodyPr>
+          <a:lstStyle/>
+          <a:p>
+            <a:pPr algn="l">
+              <a:lnSpc>
+                <a:spcPct val="135000"/>
+              </a:lnSpc>
+            </a:pPr>
+            <a:r>
+              <a:rPr sz="4000" b="1">
+                <a:solidFill>
+                  <a:srgbClr val="175A5E"/>
+                </a:solidFill>
+                <a:latin typeface="PingFang SC"/>
+                <a:ea typeface="PingFang SC"/>
+              </a:rPr>
+              <a:t>每一只被捡回家的猫，</a:t>
+            </a:r>
+          </a:p>
+          <a:p>
+            <a:pPr algn="l">
+              <a:lnSpc>
+                <a:spcPct val="135000"/>
+              </a:lnSpc>
+            </a:pPr>
+            <a:r>
+              <a:rPr sz="4000" b="1">
+                <a:solidFill>
+                  <a:srgbClr val="00C2CE"/>
+                </a:solidFill>
+                <a:latin typeface="PingFang SC"/>
+                <a:ea typeface="PingFang SC"/>
+              </a:rPr>
+              <a:t>都值得一个不慌的主人。</a:t>
+            </a:r>
+          </a:p>
+        </p:txBody>
+      </p:sp>
+      <p:sp>
+        <p:nvSpPr>
+          <p:cNvPr id="4" name="TextBox 3"/>
+          <p:cNvSpPr txBox="1"/>
+          <p:nvPr/>
+        </p:nvSpPr>
+        <p:spPr>
+          <a:xfrm>
+            <a:off x="822960" y="4480560"/>
+            <a:ext cx="10515600" cy="548640"/>
+          </a:xfrm>
+          <a:prstGeom prst="rect">
+            <a:avLst/>
+          </a:prstGeom>
+          <a:noFill/>
+        </p:spPr>
+        <p:txBody>
+          <a:bodyPr wrap="square" anchor="t">
+            <a:spAutoFit/>
+          </a:bodyPr>
+          <a:lstStyle/>
+          <a:p>
+            <a:pPr algn="l">
+              <a:lnSpc>
+                <a:spcPct val="125000"/>
+              </a:lnSpc>
+            </a:pPr>
+            <a:r>
+              <a:rPr sz="1700" b="0">
+                <a:solidFill>
+                  <a:srgbClr val="5E9095"/>
+                </a:solidFill>
+                <a:latin typeface="PingFang SC"/>
+                <a:ea typeface="PingFang SC"/>
+              </a:rPr>
+              <a:t>现在就可以体验 · 手机打开即用，无需安装</a:t>
+            </a:r>
+          </a:p>
+        </p:txBody>
+      </p:sp>
+      <p:sp>
+        <p:nvSpPr>
+          <p:cNvPr id="5" name="Rounded Rectangle 4"/>
+          <p:cNvSpPr/>
+          <p:nvPr/>
+        </p:nvSpPr>
+        <p:spPr>
+          <a:xfrm>
+            <a:off x="822960" y="5074920"/>
+            <a:ext cx="4754880" cy="566928"/>
+          </a:xfrm>
+          <a:prstGeom prst="roundRect">
+            <a:avLst>
+              <a:gd name="adj" fmla="val 50000"/>
+            </a:avLst>
+          </a:prstGeom>
+          <a:solidFill>
+            <a:srgbClr val="DDF6F5"/>
+          </a:solidFill>
+          <a:ln w="12700">
+            <a:solidFill>
+              <a:srgbClr val="DDF6F5"/>
+            </a:solidFill>
+          </a:ln>
+          <a:effectLst/>
+        </p:spPr>
+        <p:style>
+          <a:lnRef idx="1">
+            <a:schemeClr val="accent1"/>
+          </a:lnRef>
+          <a:fillRef idx="3">
+            <a:schemeClr val="accent1"/>
+          </a:fillRef>
+          <a:effectRef idx="2">
+            <a:schemeClr val="accent1"/>
+          </a:effectRef>
+          <a:fontRef idx="minor">
+            <a:schemeClr val="lt1"/>
+          </a:fontRef>
+        </p:style>
+        <p:txBody>
           <a:bodyPr rtlCol="0" anchor="ctr" wrap="none"/>
           <a:lstStyle/>
           <a:p>
@@ -5498,7 +6819,7 @@
                 <a:latin typeface="PingFang SC"/>
                 <a:ea typeface="PingFang SC"/>
               </a:rPr>
-              <a:t>12</a:t>
+              <a:t>13</a:t>
             </a:r>
           </a:p>
         </p:txBody>
